--- a/undervisningsforlob/cambridge_analytica/images/billeder.pptx
+++ b/undervisningsforlob/cambridge_analytica/images/billeder.pptx
@@ -6,9 +6,10 @@
   </p:sldMasterIdLst>
   <p:sldIdLst>
     <p:sldId id="258" r:id="rId2"/>
-    <p:sldId id="260" r:id="rId3"/>
-    <p:sldId id="259" r:id="rId4"/>
-    <p:sldId id="261" r:id="rId5"/>
+    <p:sldId id="262" r:id="rId3"/>
+    <p:sldId id="260" r:id="rId4"/>
+    <p:sldId id="259" r:id="rId5"/>
+    <p:sldId id="261" r:id="rId6"/>
   </p:sldIdLst>
   <p:sldSz cx="12192000" cy="6858000"/>
   <p:notesSz cx="6858000" cy="9144000"/>
@@ -273,7 +274,7 @@
           <a:p>
             <a:fld id="{C1DB2D6A-8309-47A0-BE5F-4FA941CB2C32}" type="datetimeFigureOut">
               <a:rPr lang="da-DK" smtClean="0"/>
-              <a:t>21-04-2026</a:t>
+              <a:t>05-06-2026</a:t>
             </a:fld>
             <a:endParaRPr lang="da-DK"/>
           </a:p>
@@ -471,7 +472,7 @@
           <a:p>
             <a:fld id="{C1DB2D6A-8309-47A0-BE5F-4FA941CB2C32}" type="datetimeFigureOut">
               <a:rPr lang="da-DK" smtClean="0"/>
-              <a:t>21-04-2026</a:t>
+              <a:t>05-06-2026</a:t>
             </a:fld>
             <a:endParaRPr lang="da-DK"/>
           </a:p>
@@ -679,7 +680,7 @@
           <a:p>
             <a:fld id="{C1DB2D6A-8309-47A0-BE5F-4FA941CB2C32}" type="datetimeFigureOut">
               <a:rPr lang="da-DK" smtClean="0"/>
-              <a:t>21-04-2026</a:t>
+              <a:t>05-06-2026</a:t>
             </a:fld>
             <a:endParaRPr lang="da-DK"/>
           </a:p>
@@ -877,7 +878,7 @@
           <a:p>
             <a:fld id="{C1DB2D6A-8309-47A0-BE5F-4FA941CB2C32}" type="datetimeFigureOut">
               <a:rPr lang="da-DK" smtClean="0"/>
-              <a:t>21-04-2026</a:t>
+              <a:t>05-06-2026</a:t>
             </a:fld>
             <a:endParaRPr lang="da-DK"/>
           </a:p>
@@ -1152,7 +1153,7 @@
           <a:p>
             <a:fld id="{C1DB2D6A-8309-47A0-BE5F-4FA941CB2C32}" type="datetimeFigureOut">
               <a:rPr lang="da-DK" smtClean="0"/>
-              <a:t>21-04-2026</a:t>
+              <a:t>05-06-2026</a:t>
             </a:fld>
             <a:endParaRPr lang="da-DK"/>
           </a:p>
@@ -1417,7 +1418,7 @@
           <a:p>
             <a:fld id="{C1DB2D6A-8309-47A0-BE5F-4FA941CB2C32}" type="datetimeFigureOut">
               <a:rPr lang="da-DK" smtClean="0"/>
-              <a:t>21-04-2026</a:t>
+              <a:t>05-06-2026</a:t>
             </a:fld>
             <a:endParaRPr lang="da-DK"/>
           </a:p>
@@ -1829,7 +1830,7 @@
           <a:p>
             <a:fld id="{C1DB2D6A-8309-47A0-BE5F-4FA941CB2C32}" type="datetimeFigureOut">
               <a:rPr lang="da-DK" smtClean="0"/>
-              <a:t>21-04-2026</a:t>
+              <a:t>05-06-2026</a:t>
             </a:fld>
             <a:endParaRPr lang="da-DK"/>
           </a:p>
@@ -1970,7 +1971,7 @@
           <a:p>
             <a:fld id="{C1DB2D6A-8309-47A0-BE5F-4FA941CB2C32}" type="datetimeFigureOut">
               <a:rPr lang="da-DK" smtClean="0"/>
-              <a:t>21-04-2026</a:t>
+              <a:t>05-06-2026</a:t>
             </a:fld>
             <a:endParaRPr lang="da-DK"/>
           </a:p>
@@ -2083,7 +2084,7 @@
           <a:p>
             <a:fld id="{C1DB2D6A-8309-47A0-BE5F-4FA941CB2C32}" type="datetimeFigureOut">
               <a:rPr lang="da-DK" smtClean="0"/>
-              <a:t>21-04-2026</a:t>
+              <a:t>05-06-2026</a:t>
             </a:fld>
             <a:endParaRPr lang="da-DK"/>
           </a:p>
@@ -2394,7 +2395,7 @@
           <a:p>
             <a:fld id="{C1DB2D6A-8309-47A0-BE5F-4FA941CB2C32}" type="datetimeFigureOut">
               <a:rPr lang="da-DK" smtClean="0"/>
-              <a:t>21-04-2026</a:t>
+              <a:t>05-06-2026</a:t>
             </a:fld>
             <a:endParaRPr lang="da-DK"/>
           </a:p>
@@ -2682,7 +2683,7 @@
           <a:p>
             <a:fld id="{C1DB2D6A-8309-47A0-BE5F-4FA941CB2C32}" type="datetimeFigureOut">
               <a:rPr lang="da-DK" smtClean="0"/>
-              <a:t>21-04-2026</a:t>
+              <a:t>05-06-2026</a:t>
             </a:fld>
             <a:endParaRPr lang="da-DK"/>
           </a:p>
@@ -2923,7 +2924,7 @@
           <a:p>
             <a:fld id="{C1DB2D6A-8309-47A0-BE5F-4FA941CB2C32}" type="datetimeFigureOut">
               <a:rPr lang="da-DK" smtClean="0"/>
-              <a:t>21-04-2026</a:t>
+              <a:t>05-06-2026</a:t>
             </a:fld>
             <a:endParaRPr lang="da-DK"/>
           </a:p>
@@ -3629,6 +3630,156 @@
         <p:cNvPr id="1" name="">
           <a:extLst>
             <a:ext uri="{FF2B5EF4-FFF2-40B4-BE49-F238E27FC236}">
+              <a16:creationId xmlns:a16="http://schemas.microsoft.com/office/drawing/2014/main" id="{F3F2099F-5276-4FE9-A2D8-280954A4A41E}"/>
+            </a:ext>
+          </a:extLst>
+        </p:cNvPr>
+        <p:cNvGrpSpPr/>
+        <p:nvPr/>
+      </p:nvGrpSpPr>
+      <p:grpSpPr>
+        <a:xfrm>
+          <a:off x="0" y="0"/>
+          <a:ext cx="0" cy="0"/>
+          <a:chOff x="0" y="0"/>
+          <a:chExt cx="0" cy="0"/>
+        </a:xfrm>
+      </p:grpSpPr>
+      <p:pic>
+        <p:nvPicPr>
+          <p:cNvPr id="3" name="Billede 2">
+            <a:extLst>
+              <a:ext uri="{FF2B5EF4-FFF2-40B4-BE49-F238E27FC236}">
+                <a16:creationId xmlns:a16="http://schemas.microsoft.com/office/drawing/2014/main" id="{FD96EBDD-9490-3FFE-8284-FA0B5281AF2B}"/>
+              </a:ext>
+            </a:extLst>
+          </p:cNvPr>
+          <p:cNvPicPr>
+            <a:picLocks noChangeAspect="1"/>
+          </p:cNvPicPr>
+          <p:nvPr/>
+        </p:nvPicPr>
+        <p:blipFill>
+          <a:blip r:embed="rId2">
+            <a:extLst>
+              <a:ext uri="{28A0092B-C50C-407E-A947-70E740481C1C}">
+                <a14:useLocalDpi xmlns:a14="http://schemas.microsoft.com/office/drawing/2010/main" val="0"/>
+              </a:ext>
+            </a:extLst>
+          </a:blip>
+          <a:srcRect t="13809"/>
+          <a:stretch>
+            <a:fillRect/>
+          </a:stretch>
+        </p:blipFill>
+        <p:spPr>
+          <a:xfrm>
+            <a:off x="20" y="1282"/>
+            <a:ext cx="12191980" cy="6856718"/>
+          </a:xfrm>
+          <a:prstGeom prst="rect">
+            <a:avLst/>
+          </a:prstGeom>
+        </p:spPr>
+      </p:pic>
+      <p:sp>
+        <p:nvSpPr>
+          <p:cNvPr id="4" name="Tekstfelt 3">
+            <a:extLst>
+              <a:ext uri="{FF2B5EF4-FFF2-40B4-BE49-F238E27FC236}">
+                <a16:creationId xmlns:a16="http://schemas.microsoft.com/office/drawing/2014/main" id="{4B58D11E-E7AE-7629-B872-2904D8030BF6}"/>
+              </a:ext>
+            </a:extLst>
+          </p:cNvPr>
+          <p:cNvSpPr txBox="1"/>
+          <p:nvPr/>
+        </p:nvSpPr>
+        <p:spPr>
+          <a:xfrm>
+            <a:off x="2546920" y="2459504"/>
+            <a:ext cx="7098161" cy="1938992"/>
+          </a:xfrm>
+          <a:prstGeom prst="rect">
+            <a:avLst/>
+          </a:prstGeom>
+          <a:noFill/>
+        </p:spPr>
+        <p:txBody>
+          <a:bodyPr wrap="none" rtlCol="0">
+            <a:spAutoFit/>
+          </a:bodyPr>
+          <a:lstStyle/>
+          <a:p>
+            <a:pPr algn="ctr"/>
+            <a:r>
+              <a:rPr lang="da-DK" sz="6000" b="1" dirty="0">
+                <a:solidFill>
+                  <a:srgbClr val="020873"/>
+                </a:solidFill>
+                <a:latin typeface="Arial Nova Light" panose="020F0502020204030204" pitchFamily="34" charset="0"/>
+              </a:rPr>
+              <a:t>Cambridge </a:t>
+            </a:r>
+            <a:r>
+              <a:rPr lang="da-DK" sz="6000" b="1" dirty="0" err="1">
+                <a:solidFill>
+                  <a:srgbClr val="020873"/>
+                </a:solidFill>
+                <a:latin typeface="Arial Nova Light" panose="020F0502020204030204" pitchFamily="34" charset="0"/>
+              </a:rPr>
+              <a:t>Analytica</a:t>
+            </a:r>
+            <a:endParaRPr lang="da-DK" sz="6000" b="1" dirty="0">
+              <a:solidFill>
+                <a:srgbClr val="020873"/>
+              </a:solidFill>
+              <a:latin typeface="Arial Nova Light" panose="020F0502020204030204" pitchFamily="34" charset="0"/>
+            </a:endParaRPr>
+          </a:p>
+          <a:p>
+            <a:pPr algn="ctr"/>
+            <a:r>
+              <a:rPr lang="da-DK" sz="6000" b="1">
+                <a:solidFill>
+                  <a:srgbClr val="020873"/>
+                </a:solidFill>
+                <a:latin typeface="Arial Nova Light" panose="020F0502020204030204" pitchFamily="34" charset="0"/>
+              </a:rPr>
+              <a:t>skandale</a:t>
+            </a:r>
+            <a:r>
+              <a:rPr lang="da-DK" sz="6000" b="1" dirty="0">
+                <a:solidFill>
+                  <a:srgbClr val="020873"/>
+                </a:solidFill>
+                <a:latin typeface="Arial Nova Light" panose="020F0502020204030204" pitchFamily="34" charset="0"/>
+              </a:rPr>
+              <a:t>n</a:t>
+            </a:r>
+          </a:p>
+        </p:txBody>
+      </p:sp>
+    </p:spTree>
+    <p:extLst>
+      <p:ext uri="{BB962C8B-B14F-4D97-AF65-F5344CB8AC3E}">
+        <p14:creationId xmlns:p14="http://schemas.microsoft.com/office/powerpoint/2010/main" val="2731079429"/>
+      </p:ext>
+    </p:extLst>
+  </p:cSld>
+  <p:clrMapOvr>
+    <a:masterClrMapping/>
+  </p:clrMapOvr>
+</p:sld>
+</file>
+
+<file path=ppt/slides/slide3.xml><?xml version="1.0" encoding="utf-8"?>
+<p:sld xmlns:a="http://schemas.openxmlformats.org/drawingml/2006/main" xmlns:r="http://schemas.openxmlformats.org/officeDocument/2006/relationships" xmlns:p="http://schemas.openxmlformats.org/presentationml/2006/main">
+  <p:cSld>
+    <p:spTree>
+      <p:nvGrpSpPr>
+        <p:cNvPr id="1" name="">
+          <a:extLst>
+            <a:ext uri="{FF2B5EF4-FFF2-40B4-BE49-F238E27FC236}">
               <a16:creationId xmlns:a16="http://schemas.microsoft.com/office/drawing/2014/main" id="{8E2F6A8D-3624-FA67-C052-1BD25AC36343}"/>
             </a:ext>
           </a:extLst>
@@ -3694,7 +3845,7 @@
 </p:sld>
 </file>
 
-<file path=ppt/slides/slide3.xml><?xml version="1.0" encoding="utf-8"?>
+<file path=ppt/slides/slide4.xml><?xml version="1.0" encoding="utf-8"?>
 <p:sld xmlns:a="http://schemas.openxmlformats.org/drawingml/2006/main" xmlns:r="http://schemas.openxmlformats.org/officeDocument/2006/relationships" xmlns:p="http://schemas.openxmlformats.org/presentationml/2006/main">
   <p:cSld>
     <p:bg>
@@ -3992,7 +4143,7 @@
 </p:sld>
 </file>
 
-<file path=ppt/slides/slide4.xml><?xml version="1.0" encoding="utf-8"?>
+<file path=ppt/slides/slide5.xml><?xml version="1.0" encoding="utf-8"?>
 <p:sld xmlns:a="http://schemas.openxmlformats.org/drawingml/2006/main" xmlns:r="http://schemas.openxmlformats.org/officeDocument/2006/relationships" xmlns:p="http://schemas.openxmlformats.org/presentationml/2006/main">
   <p:cSld>
     <p:spTree>
